--- a/assets/pptx/catalog-304.pptx
+++ b/assets/pptx/catalog-304.pptx
@@ -3260,7 +3260,7 @@
                 <a:ea typeface="Ebrima"/>
                 <a:cs typeface="Ebrima"/>
               </a:rPr>
-              <a:t>እግዚአብሔር እጅግ ልዩ ነው (2x)</a:t>
+              <a:t>እግዚአብሔር እጅግ ልዩ ነው 2x</a:t>
             </a:r>
           </a:p>
         </p:txBody>
@@ -3595,7 +3595,7 @@
                 <a:ea typeface="Ebrima"/>
                 <a:cs typeface="Ebrima"/>
               </a:rPr>
-              <a:t>አይኖርም ዘላለም (2x)</a:t>
+              <a:t>አይኖርም ዘላለም 2x</a:t>
             </a:r>
           </a:p>
         </p:txBody>
@@ -3729,7 +3729,7 @@
                 <a:ea typeface="Ebrima"/>
                 <a:cs typeface="Ebrima"/>
               </a:rPr>
-              <a:t>ያለቀውን ነገር ይሞላል የሚለው እግዚአብሔር ብቻ ነው (2x)</a:t>
+              <a:t>ያለቀውን ነገር ይሞላል የሚለው እግዚአብሔር ብቻ ነው 2x</a:t>
             </a:r>
           </a:p>
         </p:txBody>
@@ -4064,7 +4064,7 @@
                 <a:ea typeface="Ebrima"/>
                 <a:cs typeface="Ebrima"/>
               </a:rPr>
-              <a:t>አይኖርም ዘላለም (2x)</a:t>
+              <a:t>አይኖርም ዘላለም 2x</a:t>
             </a:r>
           </a:p>
         </p:txBody>
@@ -4265,7 +4265,7 @@
                 <a:ea typeface="Ebrima"/>
                 <a:cs typeface="Ebrima"/>
               </a:rPr>
-              <a:t>ህይወቴን በሰላም ሞልቶታል (2x)</a:t>
+              <a:t>ህይወቴን በሰላም ሞልቶታል 2x</a:t>
             </a:r>
           </a:p>
         </p:txBody>
@@ -4466,7 +4466,7 @@
                 <a:ea typeface="Ebrima"/>
                 <a:cs typeface="Ebrima"/>
               </a:rPr>
-              <a:t>አይኖርም ዘላለም (2x)</a:t>
+              <a:t>አይኖርም ዘላለም 2x</a:t>
             </a:r>
           </a:p>
         </p:txBody>
